--- a/classes/parte-6-analisis-de-malware/153-analisis-de-malware-en-scripts-powershell-y-javascript/clase-153-presentacion.pptx
+++ b/classes/parte-6-analisis-de-malware/153-analisis-de-malware-en-scripts-powershell-y-javascript/clase-153-presentacion.pptx
@@ -17,6 +17,9 @@
     <p:sldId id="265" r:id="rId16"/>
     <p:sldId id="266" r:id="rId17"/>
     <p:sldId id="267" r:id="rId18"/>
+    <p:sldId id="268" r:id="rId19"/>
+    <p:sldId id="269" r:id="rId20"/>
+    <p:sldId id="270" r:id="rId21"/>
   </p:sldIdLst>
   <p:sldSz cx="9144000" cy="6858000" type="screen4x3"/>
   <p:notesSz cx="6858000" cy="9144000"/>
@@ -3198,7 +3201,7 @@
                   <a:srgbClr val="0B3D2E"/>
                 </a:solidFill>
               </a:rPr>
-              <a:t>⚠️ Errores comunes</a:t>
+              <a:t>✍️ Ejercicios</a:t>
             </a:r>
           </a:p>
         </p:txBody>
@@ -3236,67 +3239,82 @@
                   <a:srgbClr val="22282E"/>
                 </a:solidFill>
               </a:rPr>
-              <a:t>•  Ejecutar el script "para ver" — Detona la infección; desofusca estáticamente o con box-js</a:t>
-            </a:r>
-          </a:p>
-          <a:p>
-            <a:pPr>
-              <a:spcAft>
-                <a:spcPts val="600"/>
-              </a:spcAft>
-            </a:pPr>
-            <a:r>
-              <a:rPr sz="1500">
-                <a:solidFill>
-                  <a:srgbClr val="22282E"/>
-                </a:solidFill>
-              </a:rPr>
-              <a:t>•  Base64 da basura — Es UTF-16LE; ajusta el decode en CyberChef</a:t>
-            </a:r>
-          </a:p>
-          <a:p>
-            <a:pPr>
-              <a:spcAft>
-                <a:spcPts val="600"/>
-              </a:spcAft>
-            </a:pPr>
-            <a:r>
-              <a:rPr sz="1500">
-                <a:solidFill>
-                  <a:srgbClr val="22282E"/>
-                </a:solidFill>
-              </a:rPr>
-              <a:t>•  Sin ScriptBlock logs — No estaba activado; habilítalo por GPO antes de detonar en lab</a:t>
-            </a:r>
-          </a:p>
-          <a:p>
-            <a:pPr>
-              <a:spcAft>
-                <a:spcPts val="600"/>
-              </a:spcAft>
-            </a:pPr>
-            <a:r>
-              <a:rPr sz="1500">
-                <a:solidFill>
-                  <a:srgbClr val="22282E"/>
-                </a:solidFill>
-              </a:rPr>
-              <a:t>•  box-js no resuelve la URL — Emulación incompleta; combina con lectura manual</a:t>
-            </a:r>
-          </a:p>
-          <a:p>
-            <a:pPr>
-              <a:spcAft>
-                <a:spcPts val="600"/>
-              </a:spcAft>
-            </a:pPr>
-            <a:r>
-              <a:rPr sz="1500">
-                <a:solidFill>
-                  <a:srgbClr val="22282E"/>
-                </a:solidFill>
-              </a:rPr>
-              <a:t>•  Perder capas de ofuscación — Ve capa por capa reemplazando el ejecutor por print</a:t>
+              <a:t>•  Desofusca un one-liner de PowerShell con 3 capas y documenta cada una.</a:t>
+            </a:r>
+          </a:p>
+          <a:p>
+            <a:pPr>
+              <a:spcAft>
+                <a:spcPts val="600"/>
+              </a:spcAft>
+            </a:pPr>
+            <a:r>
+              <a:rPr sz="1500">
+                <a:solidFill>
+                  <a:srgbClr val="22282E"/>
+                </a:solidFill>
+              </a:rPr>
+              <a:t>•  Explica cómo AMSI y ScriptBlock Logging ayudan al analista.</a:t>
+            </a:r>
+          </a:p>
+          <a:p>
+            <a:pPr>
+              <a:spcAft>
+                <a:spcPts val="600"/>
+              </a:spcAft>
+            </a:pPr>
+            <a:r>
+              <a:rPr sz="1500">
+                <a:solidFill>
+                  <a:srgbClr val="22282E"/>
+                </a:solidFill>
+              </a:rPr>
+              <a:t>•  Reconoce un patrón de inyección de shellcode en PowerShell.</a:t>
+            </a:r>
+          </a:p>
+          <a:p>
+            <a:pPr>
+              <a:spcAft>
+                <a:spcPts val="600"/>
+              </a:spcAft>
+            </a:pPr>
+            <a:r>
+              <a:rPr sz="1500">
+                <a:solidFill>
+                  <a:srgbClr val="22282E"/>
+                </a:solidFill>
+              </a:rPr>
+              <a:t>•  Usa box-js sobre un JScript y extrae la URL de segunda etapa.</a:t>
+            </a:r>
+          </a:p>
+          <a:p>
+            <a:pPr>
+              <a:spcAft>
+                <a:spcPts val="600"/>
+              </a:spcAft>
+            </a:pPr>
+            <a:r>
+              <a:rPr sz="1500">
+                <a:solidFill>
+                  <a:srgbClr val="22282E"/>
+                </a:solidFill>
+              </a:rPr>
+              <a:t>•  Convierte un IEX en Write-Output y justifica por qué es más seguro.</a:t>
+            </a:r>
+          </a:p>
+          <a:p>
+            <a:pPr>
+              <a:spcAft>
+                <a:spcPts val="600"/>
+              </a:spcAft>
+            </a:pPr>
+            <a:r>
+              <a:rPr sz="1500">
+                <a:solidFill>
+                  <a:srgbClr val="22282E"/>
+                </a:solidFill>
+              </a:rPr>
+              <a:t>•  Redacta una detección basada en el Event ID 4104.</a:t>
             </a:r>
           </a:p>
         </p:txBody>
@@ -3347,7 +3365,7 @@
                   <a:srgbClr val="0B3D2E"/>
                 </a:solidFill>
               </a:rPr>
-              <a:t>❓ Preguntas frecuentes</a:t>
+              <a:t>📝 Reto verificable</a:t>
             </a:r>
           </a:p>
         </p:txBody>
@@ -3385,37 +3403,22 @@
                   <a:srgbClr val="22282E"/>
                 </a:solidFill>
               </a:rPr>
-              <a:t>•  ❓ ¿Por qué tanto malware en PowerShell? Está firmado y preinstalado (LOLBin), ejecuta en memoria y ofusca fácilmente, reduciendo la detección basada en archivos.</a:t>
-            </a:r>
-          </a:p>
-          <a:p>
-            <a:pPr>
-              <a:spcAft>
-                <a:spcPts val="600"/>
-              </a:spcAft>
-            </a:pPr>
-            <a:r>
-              <a:rPr sz="1500">
-                <a:solidFill>
-                  <a:srgbClr val="22282E"/>
-                </a:solidFill>
-              </a:rPr>
-              <a:t>•  ❓ ¿AMSI lo detiene todo? No; existen técnicas de bypass. Aun así, AMSI y el ScriptBlock Logging entregan al defensor el contenido desofuscado, muy útil para el análisis.</a:t>
-            </a:r>
-          </a:p>
-          <a:p>
-            <a:pPr>
-              <a:spcAft>
-                <a:spcPts val="600"/>
-              </a:spcAft>
-            </a:pPr>
-            <a:r>
-              <a:rPr sz="1500">
-                <a:solidFill>
-                  <a:srgbClr val="22282E"/>
-                </a:solidFill>
-              </a:rPr>
-              <a:t>•  ❓ ¿Puedo confiar en box-js? Es una gran ayuda para JScript, pero emula un subconjunto; complementa siempre con lectura manual del código.</a:t>
+              <a:t>•  Desofusca un script malicioso (PowerShell o JScript) hasta su forma legible y entrega la cadena de ejecución con la URL/payload de segunda etapa y los IOCs, sin haberlo ejecutado.</a:t>
+            </a:r>
+          </a:p>
+          <a:p>
+            <a:pPr>
+              <a:spcAft>
+                <a:spcPts val="600"/>
+              </a:spcAft>
+            </a:pPr>
+            <a:r>
+              <a:rPr sz="1500">
+                <a:solidFill>
+                  <a:srgbClr val="22282E"/>
+                </a:solidFill>
+              </a:rPr>
+              <a:t>•  Criterio de aceptación: muestras el código final desofuscado y explicas cada capa de ofuscación deshecha, con al menos un IOC (URL/comando) verificado en el lab vía INetSim.</a:t>
             </a:r>
           </a:p>
         </p:txBody>
@@ -3466,7 +3469,7 @@
                   <a:srgbClr val="0B3D2E"/>
                 </a:solidFill>
               </a:rPr>
-              <a:t>🔗 Referencias</a:t>
+              <a:t>⚠️ Errores comunes</a:t>
             </a:r>
           </a:p>
         </p:txBody>
@@ -3504,6 +3507,274 @@
                   <a:srgbClr val="22282E"/>
                 </a:solidFill>
               </a:rPr>
+              <a:t>•  Ejecutar el script "para ver" — Detona la infección; desofusca estáticamente o con box-js</a:t>
+            </a:r>
+          </a:p>
+          <a:p>
+            <a:pPr>
+              <a:spcAft>
+                <a:spcPts val="600"/>
+              </a:spcAft>
+            </a:pPr>
+            <a:r>
+              <a:rPr sz="1500">
+                <a:solidFill>
+                  <a:srgbClr val="22282E"/>
+                </a:solidFill>
+              </a:rPr>
+              <a:t>•  Base64 da basura — Es UTF-16LE; ajusta el decode en CyberChef</a:t>
+            </a:r>
+          </a:p>
+          <a:p>
+            <a:pPr>
+              <a:spcAft>
+                <a:spcPts val="600"/>
+              </a:spcAft>
+            </a:pPr>
+            <a:r>
+              <a:rPr sz="1500">
+                <a:solidFill>
+                  <a:srgbClr val="22282E"/>
+                </a:solidFill>
+              </a:rPr>
+              <a:t>•  Sin ScriptBlock logs — No estaba activado; habilítalo por GPO antes de detonar en lab</a:t>
+            </a:r>
+          </a:p>
+          <a:p>
+            <a:pPr>
+              <a:spcAft>
+                <a:spcPts val="600"/>
+              </a:spcAft>
+            </a:pPr>
+            <a:r>
+              <a:rPr sz="1500">
+                <a:solidFill>
+                  <a:srgbClr val="22282E"/>
+                </a:solidFill>
+              </a:rPr>
+              <a:t>•  box-js no resuelve la URL — Emulación incompleta; combina con lectura manual</a:t>
+            </a:r>
+          </a:p>
+          <a:p>
+            <a:pPr>
+              <a:spcAft>
+                <a:spcPts val="600"/>
+              </a:spcAft>
+            </a:pPr>
+            <a:r>
+              <a:rPr sz="1500">
+                <a:solidFill>
+                  <a:srgbClr val="22282E"/>
+                </a:solidFill>
+              </a:rPr>
+              <a:t>•  Perder capas de ofuscación — Ve capa por capa reemplazando el ejecutor por print</a:t>
+            </a:r>
+          </a:p>
+        </p:txBody>
+      </p:sp>
+    </p:spTree>
+  </p:cSld>
+  <p:clrMapOvr>
+    <a:masterClrMapping/>
+  </p:clrMapOvr>
+</p:sld>
+</file>
+
+<file path=ppt/slides/slide13.xml><?xml version="1.0" encoding="utf-8"?>
+<p:sld xmlns:a="http://schemas.openxmlformats.org/drawingml/2006/main" xmlns:p="http://schemas.openxmlformats.org/presentationml/2006/main" xmlns:r="http://schemas.openxmlformats.org/officeDocument/2006/relationships">
+  <p:cSld>
+    <p:spTree>
+      <p:nvGrpSpPr>
+        <p:cNvPr id="1" name=""/>
+        <p:cNvGrpSpPr/>
+        <p:nvPr/>
+      </p:nvGrpSpPr>
+      <p:grpSpPr/>
+      <p:sp>
+        <p:nvSpPr>
+          <p:cNvPr id="2" name="TextBox 1"/>
+          <p:cNvSpPr txBox="1"/>
+          <p:nvPr/>
+        </p:nvSpPr>
+        <p:spPr>
+          <a:xfrm>
+            <a:off x="457200" y="320040"/>
+            <a:ext cx="8229600" cy="822960"/>
+          </a:xfrm>
+          <a:prstGeom prst="rect">
+            <a:avLst/>
+          </a:prstGeom>
+          <a:noFill/>
+        </p:spPr>
+        <p:txBody>
+          <a:bodyPr wrap="square">
+            <a:spAutoFit/>
+          </a:bodyPr>
+          <a:lstStyle/>
+          <a:p>
+            <a:r>
+              <a:rPr sz="2600" b="1">
+                <a:solidFill>
+                  <a:srgbClr val="0B3D2E"/>
+                </a:solidFill>
+              </a:rPr>
+              <a:t>❓ Preguntas frecuentes</a:t>
+            </a:r>
+          </a:p>
+        </p:txBody>
+      </p:sp>
+      <p:sp>
+        <p:nvSpPr>
+          <p:cNvPr id="3" name="TextBox 2"/>
+          <p:cNvSpPr txBox="1"/>
+          <p:nvPr/>
+        </p:nvSpPr>
+        <p:spPr>
+          <a:xfrm>
+            <a:off x="457200" y="1280160"/>
+            <a:ext cx="8229600" cy="4937760"/>
+          </a:xfrm>
+          <a:prstGeom prst="rect">
+            <a:avLst/>
+          </a:prstGeom>
+          <a:noFill/>
+        </p:spPr>
+        <p:txBody>
+          <a:bodyPr wrap="square">
+            <a:spAutoFit/>
+          </a:bodyPr>
+          <a:lstStyle/>
+          <a:p>
+            <a:pPr>
+              <a:spcAft>
+                <a:spcPts val="600"/>
+              </a:spcAft>
+            </a:pPr>
+            <a:r>
+              <a:rPr sz="1500">
+                <a:solidFill>
+                  <a:srgbClr val="22282E"/>
+                </a:solidFill>
+              </a:rPr>
+              <a:t>•  ❓ ¿Por qué tanto malware en PowerShell? Está firmado y preinstalado (LOLBin), ejecuta en memoria y ofusca fácilmente, reduciendo la detección basada en archivos.</a:t>
+            </a:r>
+          </a:p>
+          <a:p>
+            <a:pPr>
+              <a:spcAft>
+                <a:spcPts val="600"/>
+              </a:spcAft>
+            </a:pPr>
+            <a:r>
+              <a:rPr sz="1500">
+                <a:solidFill>
+                  <a:srgbClr val="22282E"/>
+                </a:solidFill>
+              </a:rPr>
+              <a:t>•  ❓ ¿AMSI lo detiene todo? No; existen técnicas de bypass. Aun así, AMSI y el ScriptBlock Logging entregan al defensor el contenido desofuscado, muy útil para el análisis.</a:t>
+            </a:r>
+          </a:p>
+          <a:p>
+            <a:pPr>
+              <a:spcAft>
+                <a:spcPts val="600"/>
+              </a:spcAft>
+            </a:pPr>
+            <a:r>
+              <a:rPr sz="1500">
+                <a:solidFill>
+                  <a:srgbClr val="22282E"/>
+                </a:solidFill>
+              </a:rPr>
+              <a:t>•  ❓ ¿Puedo confiar en box-js? Es una gran ayuda para JScript, pero emula un subconjunto; complementa siempre con lectura manual del código.</a:t>
+            </a:r>
+          </a:p>
+        </p:txBody>
+      </p:sp>
+    </p:spTree>
+  </p:cSld>
+  <p:clrMapOvr>
+    <a:masterClrMapping/>
+  </p:clrMapOvr>
+</p:sld>
+</file>
+
+<file path=ppt/slides/slide14.xml><?xml version="1.0" encoding="utf-8"?>
+<p:sld xmlns:a="http://schemas.openxmlformats.org/drawingml/2006/main" xmlns:p="http://schemas.openxmlformats.org/presentationml/2006/main" xmlns:r="http://schemas.openxmlformats.org/officeDocument/2006/relationships">
+  <p:cSld>
+    <p:spTree>
+      <p:nvGrpSpPr>
+        <p:cNvPr id="1" name=""/>
+        <p:cNvGrpSpPr/>
+        <p:nvPr/>
+      </p:nvGrpSpPr>
+      <p:grpSpPr/>
+      <p:sp>
+        <p:nvSpPr>
+          <p:cNvPr id="2" name="TextBox 1"/>
+          <p:cNvSpPr txBox="1"/>
+          <p:nvPr/>
+        </p:nvSpPr>
+        <p:spPr>
+          <a:xfrm>
+            <a:off x="457200" y="320040"/>
+            <a:ext cx="8229600" cy="822960"/>
+          </a:xfrm>
+          <a:prstGeom prst="rect">
+            <a:avLst/>
+          </a:prstGeom>
+          <a:noFill/>
+        </p:spPr>
+        <p:txBody>
+          <a:bodyPr wrap="square">
+            <a:spAutoFit/>
+          </a:bodyPr>
+          <a:lstStyle/>
+          <a:p>
+            <a:r>
+              <a:rPr sz="2600" b="1">
+                <a:solidFill>
+                  <a:srgbClr val="0B3D2E"/>
+                </a:solidFill>
+              </a:rPr>
+              <a:t>🔗 Referencias</a:t>
+            </a:r>
+          </a:p>
+        </p:txBody>
+      </p:sp>
+      <p:sp>
+        <p:nvSpPr>
+          <p:cNvPr id="3" name="TextBox 2"/>
+          <p:cNvSpPr txBox="1"/>
+          <p:nvPr/>
+        </p:nvSpPr>
+        <p:spPr>
+          <a:xfrm>
+            <a:off x="457200" y="1280160"/>
+            <a:ext cx="8229600" cy="4937760"/>
+          </a:xfrm>
+          <a:prstGeom prst="rect">
+            <a:avLst/>
+          </a:prstGeom>
+          <a:noFill/>
+        </p:spPr>
+        <p:txBody>
+          <a:bodyPr wrap="square">
+            <a:spAutoFit/>
+          </a:bodyPr>
+          <a:lstStyle/>
+          <a:p>
+            <a:pPr>
+              <a:spcAft>
+                <a:spcPts val="600"/>
+              </a:spcAft>
+            </a:pPr>
+            <a:r>
+              <a:rPr sz="1500">
+                <a:solidFill>
+                  <a:srgbClr val="22282E"/>
+                </a:solidFill>
+              </a:rPr>
               <a:t>•  Monnappa K. A., Learning Malware Analysis.</a:t>
             </a:r>
           </a:p>
@@ -3554,6 +3825,81 @@
           </a:p>
         </p:txBody>
       </p:sp>
+    </p:spTree>
+  </p:cSld>
+  <p:clrMapOvr>
+    <a:masterClrMapping/>
+  </p:clrMapOvr>
+</p:sld>
+</file>
+
+<file path=ppt/slides/slide15.xml><?xml version="1.0" encoding="utf-8"?>
+<p:sld xmlns:a="http://schemas.openxmlformats.org/drawingml/2006/main" xmlns:p="http://schemas.openxmlformats.org/presentationml/2006/main" xmlns:r="http://schemas.openxmlformats.org/officeDocument/2006/relationships">
+  <p:cSld>
+    <p:spTree>
+      <p:nvGrpSpPr>
+        <p:cNvPr id="1" name=""/>
+        <p:cNvGrpSpPr/>
+        <p:nvPr/>
+      </p:nvGrpSpPr>
+      <p:grpSpPr/>
+      <p:sp>
+        <p:nvSpPr>
+          <p:cNvPr id="2" name="TextBox 1"/>
+          <p:cNvSpPr txBox="1"/>
+          <p:nvPr/>
+        </p:nvSpPr>
+        <p:spPr>
+          <a:xfrm>
+            <a:off x="457200" y="274320"/>
+            <a:ext cx="8229600" cy="640080"/>
+          </a:xfrm>
+          <a:prstGeom prst="rect">
+            <a:avLst/>
+          </a:prstGeom>
+          <a:noFill/>
+        </p:spPr>
+        <p:txBody>
+          <a:bodyPr wrap="square">
+            <a:spAutoFit/>
+          </a:bodyPr>
+          <a:lstStyle/>
+          <a:p>
+            <a:r>
+              <a:rPr sz="2200" b="1">
+                <a:solidFill>
+                  <a:srgbClr val="0B3D2E"/>
+                </a:solidFill>
+              </a:rPr>
+              <a:t>Diagrama de la clase</a:t>
+            </a:r>
+          </a:p>
+        </p:txBody>
+      </p:sp>
+      <p:pic>
+        <p:nvPicPr>
+          <p:cNvPr id="3" name="Picture 2" descr="803180a43fa6996f.png"/>
+          <p:cNvPicPr>
+            <a:picLocks noChangeAspect="1"/>
+          </p:cNvPicPr>
+          <p:nvPr/>
+        </p:nvPicPr>
+        <p:blipFill>
+          <a:blip r:embed="rId2"/>
+          <a:stretch>
+            <a:fillRect/>
+          </a:stretch>
+        </p:blipFill>
+        <p:spPr>
+          <a:xfrm>
+            <a:off x="457200" y="2793492"/>
+            <a:ext cx="8229600" cy="1911096"/>
+          </a:xfrm>
+          <a:prstGeom prst="rect">
+            <a:avLst/>
+          </a:prstGeom>
+        </p:spPr>
+      </p:pic>
     </p:spTree>
   </p:cSld>
   <p:clrMapOvr>
@@ -3638,7 +3984,7 @@
                   <a:srgbClr val="22282E"/>
                 </a:solidFill>
               </a:rPr>
-              <a:t>•  Desofuscar y entender malware basado en scripts, hoy dominante en las primeras etapas de intrusión: PowerShell, JScript/JavaScript (WSH), HTA y VBScript. El alumno aprenderá a deshacer capas de ofuscación, reconocer patrones de descarga e inyección en memoria, y usar el logging del propio sistema para reconstruir lo que el script hizo.</a:t>
+              <a:t>•  Desofuscar y entender malware basado en scripts, hoy dominante en las primeras etapas de intrusión: PowerShell, JScript/JavaScript (WSH), HTA y VBScript. El alumno aprenderá a deshacer capas de…</a:t>
             </a:r>
           </a:p>
         </p:txBody>
@@ -4032,7 +4378,7 @@
                   <a:srgbClr val="0B3D2E"/>
                 </a:solidFill>
               </a:rPr>
-              <a:t>📖 Definiciones y características</a:t>
+              <a:t>🧠 Explicación en profundidad</a:t>
             </a:r>
           </a:p>
         </p:txBody>
@@ -4070,67 +4416,97 @@
                   <a:srgbClr val="22282E"/>
                 </a:solidFill>
               </a:rPr>
-              <a:t>•  IEX (Invoke-Expression): ejecuta una cadena como código. Característica clave: detonador de payloads ofuscados.</a:t>
-            </a:r>
-          </a:p>
-          <a:p>
-            <a:pPr>
-              <a:spcAft>
-                <a:spcPts val="600"/>
-              </a:spcAft>
-            </a:pPr>
-            <a:r>
-              <a:rPr sz="1500">
-                <a:solidFill>
-                  <a:srgbClr val="22282E"/>
-                </a:solidFill>
-              </a:rPr>
-              <a:t>•  Reflective loading: cargar un ensamblado/PE en memoria sin tocar disco. Característica clave: fileless.</a:t>
-            </a:r>
-          </a:p>
-          <a:p>
-            <a:pPr>
-              <a:spcAft>
-                <a:spcPts val="600"/>
-              </a:spcAft>
-            </a:pPr>
-            <a:r>
-              <a:rPr sz="1500">
-                <a:solidFill>
-                  <a:srgbClr val="22282E"/>
-                </a:solidFill>
-              </a:rPr>
-              <a:t>•  AMSI: interfaz antimalware que inspecciona scripts en runtime. Característica clave: desofusca para el defensor.</a:t>
-            </a:r>
-          </a:p>
-          <a:p>
-            <a:pPr>
-              <a:spcAft>
-                <a:spcPts val="600"/>
-              </a:spcAft>
-            </a:pPr>
-            <a:r>
-              <a:rPr sz="1500">
-                <a:solidFill>
-                  <a:srgbClr val="22282E"/>
-                </a:solidFill>
-              </a:rPr>
-              <a:t>•  ScriptBlock Logging: registro de bloques de PowerShell ejecutados. Característica clave: forense de scripts.</a:t>
-            </a:r>
-          </a:p>
-          <a:p>
-            <a:pPr>
-              <a:spcAft>
-                <a:spcPts val="600"/>
-              </a:spcAft>
-            </a:pPr>
-            <a:r>
-              <a:rPr sz="1500">
-                <a:solidFill>
-                  <a:srgbClr val="22282E"/>
-                </a:solidFill>
-              </a:rPr>
-              <a:t>•  HTA: aplicación HTML ejecutada por mshta. Característica clave: entrega con confianza del SO.</a:t>
+              <a:t>•  Una parte enorme del malware moderno no es un ejecutable compilado, sino un script —PowerShell,</a:t>
+            </a:r>
+          </a:p>
+          <a:p>
+            <a:pPr>
+              <a:spcAft>
+                <a:spcPts val="600"/>
+              </a:spcAft>
+            </a:pPr>
+            <a:r>
+              <a:rPr sz="1500">
+                <a:solidFill>
+                  <a:srgbClr val="22282E"/>
+                </a:solidFill>
+              </a:rPr>
+              <a:t>•  JavaScript, VBScript—. La razón es estratégica: los scripts usan intérpretes que ya vienen en el</a:t>
+            </a:r>
+          </a:p>
+          <a:p>
+            <a:pPr>
+              <a:spcAft>
+                <a:spcPts val="600"/>
+              </a:spcAft>
+            </a:pPr>
+            <a:r>
+              <a:rPr sz="1500">
+                <a:solidFill>
+                  <a:srgbClr val="22282E"/>
+                </a:solidFill>
+              </a:rPr>
+              <a:t>•  sistema (powershell.exe, wscript.exe, mshta.exe), firmados por Microsoft y de confianza, así que</a:t>
+            </a:r>
+          </a:p>
+          <a:p>
+            <a:pPr>
+              <a:spcAft>
+                <a:spcPts val="600"/>
+              </a:spcAft>
+            </a:pPr>
+            <a:r>
+              <a:rPr sz="1500">
+                <a:solidFill>
+                  <a:srgbClr val="22282E"/>
+                </a:solidFill>
+              </a:rPr>
+              <a:t>•  ejecutar un script no requiere traer un binario que el antivirus detectaría —es living off the land</a:t>
+            </a:r>
+          </a:p>
+          <a:p>
+            <a:pPr>
+              <a:spcAft>
+                <a:spcPts val="600"/>
+              </a:spcAft>
+            </a:pPr>
+            <a:r>
+              <a:rPr sz="1500">
+                <a:solidFill>
+                  <a:srgbClr val="22282E"/>
+                </a:solidFill>
+              </a:rPr>
+              <a:t>•  (Clase 159)—. Además, los scripts se pueden ejecutar</a:t>
+            </a:r>
+          </a:p>
+          <a:p>
+            <a:pPr>
+              <a:spcAft>
+                <a:spcPts val="600"/>
+              </a:spcAft>
+            </a:pPr>
+            <a:r>
+              <a:rPr sz="1500">
+                <a:solidFill>
+                  <a:srgbClr val="22282E"/>
+                </a:solidFill>
+              </a:rPr>
+              <a:t>•  en memoria sin tocar el disco (fileless), son fáciles de ofuscar y de modificar, y a menudo son la</a:t>
+            </a:r>
+          </a:p>
+          <a:p>
+            <a:pPr>
+              <a:spcAft>
+                <a:spcPts val="600"/>
+              </a:spcAft>
+            </a:pPr>
+            <a:r>
+              <a:rPr sz="1500">
+                <a:solidFill>
+                  <a:srgbClr val="22282E"/>
+                </a:solidFill>
+              </a:rPr>
+              <a:t>•  etapa que un maldoc (clase 152) invoca. Analizar malware en scripts es distinto de analizar un binario:</a:t>
             </a:r>
           </a:p>
         </p:txBody>
@@ -4181,7 +4557,7 @@
                   <a:srgbClr val="0B3D2E"/>
                 </a:solidFill>
               </a:rPr>
-              <a:t>🧰 Herramientas y preparación</a:t>
+              <a:t>📖 Definiciones y características</a:t>
             </a:r>
           </a:p>
         </p:txBody>
@@ -4219,52 +4595,67 @@
                   <a:srgbClr val="22282E"/>
                 </a:solidFill>
               </a:rPr>
-              <a:t>•  CyberChef y PowerShell ISE/VSCode para desofuscar (sin Invoke).</a:t>
-            </a:r>
-          </a:p>
-          <a:p>
-            <a:pPr>
-              <a:spcAft>
-                <a:spcPts val="600"/>
-              </a:spcAft>
-            </a:pPr>
-            <a:r>
-              <a:rPr sz="1500">
-                <a:solidFill>
-                  <a:srgbClr val="22282E"/>
-                </a:solidFill>
-              </a:rPr>
-              <a:t>•  AMSIScriptContentRetrieval, PSDecode, box-js (JScript), js-beautify.</a:t>
-            </a:r>
-          </a:p>
-          <a:p>
-            <a:pPr>
-              <a:spcAft>
-                <a:spcPts val="600"/>
-              </a:spcAft>
-            </a:pPr>
-            <a:r>
-              <a:rPr sz="1500">
-                <a:solidFill>
-                  <a:srgbClr val="22282E"/>
-                </a:solidFill>
-              </a:rPr>
-              <a:t>•  Logs: Event Viewer (Microsoft-Windows-PowerShell/Operational), Sysmon.</a:t>
-            </a:r>
-          </a:p>
-          <a:p>
-            <a:pPr>
-              <a:spcAft>
-                <a:spcPts val="600"/>
-              </a:spcAft>
-            </a:pPr>
-            <a:r>
-              <a:rPr sz="1500">
-                <a:solidFill>
-                  <a:srgbClr val="22282E"/>
-                </a:solidFill>
-              </a:rPr>
-              <a:t>•  REMnux para las utilidades de JavaScript.</a:t>
+              <a:t>•  IEX (Invoke-Expression): ejecuta una cadena como código. Característica clave: detonador de payloads ofuscados.</a:t>
+            </a:r>
+          </a:p>
+          <a:p>
+            <a:pPr>
+              <a:spcAft>
+                <a:spcPts val="600"/>
+              </a:spcAft>
+            </a:pPr>
+            <a:r>
+              <a:rPr sz="1500">
+                <a:solidFill>
+                  <a:srgbClr val="22282E"/>
+                </a:solidFill>
+              </a:rPr>
+              <a:t>•  Reflective loading: cargar un ensamblado/PE en memoria sin tocar disco. Característica clave: fileless.</a:t>
+            </a:r>
+          </a:p>
+          <a:p>
+            <a:pPr>
+              <a:spcAft>
+                <a:spcPts val="600"/>
+              </a:spcAft>
+            </a:pPr>
+            <a:r>
+              <a:rPr sz="1500">
+                <a:solidFill>
+                  <a:srgbClr val="22282E"/>
+                </a:solidFill>
+              </a:rPr>
+              <a:t>•  AMSI: interfaz antimalware que inspecciona scripts en runtime. Característica clave: desofusca para el defensor.</a:t>
+            </a:r>
+          </a:p>
+          <a:p>
+            <a:pPr>
+              <a:spcAft>
+                <a:spcPts val="600"/>
+              </a:spcAft>
+            </a:pPr>
+            <a:r>
+              <a:rPr sz="1500">
+                <a:solidFill>
+                  <a:srgbClr val="22282E"/>
+                </a:solidFill>
+              </a:rPr>
+              <a:t>•  ScriptBlock Logging: registro de bloques de PowerShell ejecutados. Característica clave: forense de scripts.</a:t>
+            </a:r>
+          </a:p>
+          <a:p>
+            <a:pPr>
+              <a:spcAft>
+                <a:spcPts val="600"/>
+              </a:spcAft>
+            </a:pPr>
+            <a:r>
+              <a:rPr sz="1500">
+                <a:solidFill>
+                  <a:srgbClr val="22282E"/>
+                </a:solidFill>
+              </a:rPr>
+              <a:t>•  HTA: aplicación HTML ejecutada por mshta. Característica clave: entrega con confianza del SO.</a:t>
             </a:r>
           </a:p>
         </p:txBody>
@@ -4315,7 +4706,7 @@
                   <a:srgbClr val="0B3D2E"/>
                 </a:solidFill>
               </a:rPr>
-              <a:t>🧪 Laboratorio guiado</a:t>
+              <a:t>📔 Glosario</a:t>
             </a:r>
           </a:p>
         </p:txBody>
@@ -4353,97 +4744,97 @@
                   <a:srgbClr val="22282E"/>
                 </a:solidFill>
               </a:rPr>
-              <a:t>•  PowerShell ofuscado:</a:t>
-            </a:r>
-          </a:p>
-          <a:p>
-            <a:pPr>
-              <a:spcAft>
-                <a:spcPts val="600"/>
-              </a:spcAft>
-            </a:pPr>
-            <a:r>
-              <a:rPr sz="1500">
-                <a:solidFill>
-                  <a:srgbClr val="22282E"/>
-                </a:solidFill>
-              </a:rPr>
-              <a:t>•  Identifica las capas: -enc (base64 UTF-16LE), -join, [char],   (backticks), Replace, Format.</a:t>
-            </a:r>
-          </a:p>
-          <a:p>
-            <a:pPr>
-              <a:spcAft>
-                <a:spcPts val="600"/>
-              </a:spcAft>
-            </a:pPr>
-            <a:r>
-              <a:rPr sz="1500">
-                <a:solidFill>
-                  <a:srgbClr val="22282E"/>
-                </a:solidFill>
-              </a:rPr>
-              <a:t>•  Decodifica el base64 con CyberChef (From Base64 + Decode text UTF-16LE).</a:t>
-            </a:r>
-          </a:p>
-          <a:p>
-            <a:pPr>
-              <a:spcAft>
-                <a:spcPts val="600"/>
-              </a:spcAft>
-            </a:pPr>
-            <a:r>
-              <a:rPr sz="1500">
-                <a:solidFill>
-                  <a:srgbClr val="22282E"/>
-                </a:solidFill>
-              </a:rPr>
-              <a:t>•  Sustituye el IEX final por Write-Output para revelar la siguiente capa sin ejecutarla. Repite hasta el código limpio.</a:t>
-            </a:r>
-          </a:p>
-          <a:p>
-            <a:pPr>
-              <a:spcAft>
-                <a:spcPts val="600"/>
-              </a:spcAft>
-            </a:pPr>
-            <a:r>
-              <a:rPr sz="1500">
-                <a:solidFill>
-                  <a:srgbClr val="22282E"/>
-                </a:solidFill>
-              </a:rPr>
-              <a:t>•  Localiza la lógica real: Net.WebClient.DownloadString, Reflection.Assembly, shellcode en [Byte[]], VirtualAlloc/CreateThread (inyección).</a:t>
-            </a:r>
-          </a:p>
-          <a:p>
-            <a:pPr>
-              <a:spcAft>
-                <a:spcPts val="600"/>
-              </a:spcAft>
-            </a:pPr>
-            <a:r>
-              <a:rPr sz="1500">
-                <a:solidFill>
-                  <a:srgbClr val="22282E"/>
-                </a:solidFill>
-              </a:rPr>
-              <a:t>•  Correlaciona con ScriptBlock Logging: activa el registro, y en una ejecución controlada previa (o en logs provistos) recupera el bloque desofuscado que Windows ya registró.</a:t>
-            </a:r>
-          </a:p>
-          <a:p>
-            <a:pPr>
-              <a:spcAft>
-                <a:spcPts val="600"/>
-              </a:spcAft>
-            </a:pPr>
-            <a:r>
-              <a:rPr sz="1500">
-                <a:solidFill>
-                  <a:srgbClr val="22282E"/>
-                </a:solidFill>
-              </a:rPr>
-              <a:t>•  JScript/HTA:</a:t>
+              <a:t>•  Término — Definición concisa</a:t>
+            </a:r>
+          </a:p>
+          <a:p>
+            <a:pPr>
+              <a:spcAft>
+                <a:spcPts val="600"/>
+              </a:spcAft>
+            </a:pPr>
+            <a:r>
+              <a:rPr sz="1500">
+                <a:solidFill>
+                  <a:srgbClr val="22282E"/>
+                </a:solidFill>
+              </a:rPr>
+              <a:t>•  Malware en scripts — Malware escrito en PowerShell, JScript, VBScript</a:t>
+            </a:r>
+          </a:p>
+          <a:p>
+            <a:pPr>
+              <a:spcAft>
+                <a:spcPts val="600"/>
+              </a:spcAft>
+            </a:pPr>
+            <a:r>
+              <a:rPr sz="1500">
+                <a:solidFill>
+                  <a:srgbClr val="22282E"/>
+                </a:solidFill>
+              </a:rPr>
+              <a:t>•  Intérprete de confianza — powershell/wscript/mshta, firmados por Microsoft</a:t>
+            </a:r>
+          </a:p>
+          <a:p>
+            <a:pPr>
+              <a:spcAft>
+                <a:spcPts val="600"/>
+              </a:spcAft>
+            </a:pPr>
+            <a:r>
+              <a:rPr sz="1500">
+                <a:solidFill>
+                  <a:srgbClr val="22282E"/>
+                </a:solidFill>
+              </a:rPr>
+              <a:t>•  PowerShell ofensivo — Acceso a la API y a .NET; carga en memoria</a:t>
+            </a:r>
+          </a:p>
+          <a:p>
+            <a:pPr>
+              <a:spcAft>
+                <a:spcPts val="600"/>
+              </a:spcAft>
+            </a:pPr>
+            <a:r>
+              <a:rPr sz="1500">
+                <a:solidFill>
+                  <a:srgbClr val="22282E"/>
+                </a:solidFill>
+              </a:rPr>
+              <a:t>•  EncodedCommand — Comando PowerShell codificado en Base64</a:t>
+            </a:r>
+          </a:p>
+          <a:p>
+            <a:pPr>
+              <a:spcAft>
+                <a:spcPts val="600"/>
+              </a:spcAft>
+            </a:pPr>
+            <a:r>
+              <a:rPr sz="1500">
+                <a:solidFill>
+                  <a:srgbClr val="22282E"/>
+                </a:solidFill>
+              </a:rPr>
+              <a:t>•  Reflective loading — Cargar un ensamblado en memoria sin tocar disco</a:t>
+            </a:r>
+          </a:p>
+          <a:p>
+            <a:pPr>
+              <a:spcAft>
+                <a:spcPts val="600"/>
+              </a:spcAft>
+            </a:pPr>
+            <a:r>
+              <a:rPr sz="1500">
+                <a:solidFill>
+                  <a:srgbClr val="22282E"/>
+                </a:solidFill>
+              </a:rPr>
+              <a:t>•  IEX (Invoke-Expression) — Ejecuta una cadena como código</a:t>
             </a:r>
           </a:p>
         </p:txBody>
@@ -4494,7 +4885,7 @@
                   <a:srgbClr val="0B3D2E"/>
                 </a:solidFill>
               </a:rPr>
-              <a:t>✍️ Ejercicios</a:t>
+              <a:t>🧰 Herramientas y preparación</a:t>
             </a:r>
           </a:p>
         </p:txBody>
@@ -4532,82 +4923,52 @@
                   <a:srgbClr val="22282E"/>
                 </a:solidFill>
               </a:rPr>
-              <a:t>•  Desofusca un one-liner de PowerShell con 3 capas y documenta cada una.</a:t>
-            </a:r>
-          </a:p>
-          <a:p>
-            <a:pPr>
-              <a:spcAft>
-                <a:spcPts val="600"/>
-              </a:spcAft>
-            </a:pPr>
-            <a:r>
-              <a:rPr sz="1500">
-                <a:solidFill>
-                  <a:srgbClr val="22282E"/>
-                </a:solidFill>
-              </a:rPr>
-              <a:t>•  Explica cómo AMSI y ScriptBlock Logging ayudan al analista.</a:t>
-            </a:r>
-          </a:p>
-          <a:p>
-            <a:pPr>
-              <a:spcAft>
-                <a:spcPts val="600"/>
-              </a:spcAft>
-            </a:pPr>
-            <a:r>
-              <a:rPr sz="1500">
-                <a:solidFill>
-                  <a:srgbClr val="22282E"/>
-                </a:solidFill>
-              </a:rPr>
-              <a:t>•  Reconoce un patrón de inyección de shellcode en PowerShell.</a:t>
-            </a:r>
-          </a:p>
-          <a:p>
-            <a:pPr>
-              <a:spcAft>
-                <a:spcPts val="600"/>
-              </a:spcAft>
-            </a:pPr>
-            <a:r>
-              <a:rPr sz="1500">
-                <a:solidFill>
-                  <a:srgbClr val="22282E"/>
-                </a:solidFill>
-              </a:rPr>
-              <a:t>•  Usa box-js sobre un JScript y extrae la URL de segunda etapa.</a:t>
-            </a:r>
-          </a:p>
-          <a:p>
-            <a:pPr>
-              <a:spcAft>
-                <a:spcPts val="600"/>
-              </a:spcAft>
-            </a:pPr>
-            <a:r>
-              <a:rPr sz="1500">
-                <a:solidFill>
-                  <a:srgbClr val="22282E"/>
-                </a:solidFill>
-              </a:rPr>
-              <a:t>•  Convierte un IEX en Write-Output y justifica por qué es más seguro.</a:t>
-            </a:r>
-          </a:p>
-          <a:p>
-            <a:pPr>
-              <a:spcAft>
-                <a:spcPts val="600"/>
-              </a:spcAft>
-            </a:pPr>
-            <a:r>
-              <a:rPr sz="1500">
-                <a:solidFill>
-                  <a:srgbClr val="22282E"/>
-                </a:solidFill>
-              </a:rPr>
-              <a:t>•  Redacta una detección basada en el Event ID 4104.</a:t>
+              <a:t>•  CyberChef y PowerShell ISE/VSCode para desofuscar (sin Invoke).</a:t>
+            </a:r>
+          </a:p>
+          <a:p>
+            <a:pPr>
+              <a:spcAft>
+                <a:spcPts val="600"/>
+              </a:spcAft>
+            </a:pPr>
+            <a:r>
+              <a:rPr sz="1500">
+                <a:solidFill>
+                  <a:srgbClr val="22282E"/>
+                </a:solidFill>
+              </a:rPr>
+              <a:t>•  AMSIScriptContentRetrieval, PSDecode, box-js (JScript), js-beautify.</a:t>
+            </a:r>
+          </a:p>
+          <a:p>
+            <a:pPr>
+              <a:spcAft>
+                <a:spcPts val="600"/>
+              </a:spcAft>
+            </a:pPr>
+            <a:r>
+              <a:rPr sz="1500">
+                <a:solidFill>
+                  <a:srgbClr val="22282E"/>
+                </a:solidFill>
+              </a:rPr>
+              <a:t>•  Logs: Event Viewer (Microsoft-Windows-PowerShell/Operational), Sysmon.</a:t>
+            </a:r>
+          </a:p>
+          <a:p>
+            <a:pPr>
+              <a:spcAft>
+                <a:spcPts val="600"/>
+              </a:spcAft>
+            </a:pPr>
+            <a:r>
+              <a:rPr sz="1500">
+                <a:solidFill>
+                  <a:srgbClr val="22282E"/>
+                </a:solidFill>
+              </a:rPr>
+              <a:t>•  REMnux para las utilidades de JavaScript.</a:t>
             </a:r>
           </a:p>
         </p:txBody>
@@ -4658,7 +5019,7 @@
                   <a:srgbClr val="0B3D2E"/>
                 </a:solidFill>
               </a:rPr>
-              <a:t>📝 Reto verificable</a:t>
+              <a:t>🧪 Laboratorio guiado</a:t>
             </a:r>
           </a:p>
         </p:txBody>
@@ -4696,22 +5057,97 @@
                   <a:srgbClr val="22282E"/>
                 </a:solidFill>
               </a:rPr>
-              <a:t>•  Desofusca un script malicioso (PowerShell o JScript) hasta su forma legible y entrega la cadena de ejecución con la URL/payload de segunda etapa y los IOCs, sin haberlo ejecutado.</a:t>
-            </a:r>
-          </a:p>
-          <a:p>
-            <a:pPr>
-              <a:spcAft>
-                <a:spcPts val="600"/>
-              </a:spcAft>
-            </a:pPr>
-            <a:r>
-              <a:rPr sz="1500">
-                <a:solidFill>
-                  <a:srgbClr val="22282E"/>
-                </a:solidFill>
-              </a:rPr>
-              <a:t>•  Criterio de aceptación: muestras el código final desofuscado y explicas cada capa de ofuscación deshecha, con al menos un IOC (URL/comando) verificado en el lab vía INetSim.</a:t>
+              <a:t>•  PowerShell ofuscado:</a:t>
+            </a:r>
+          </a:p>
+          <a:p>
+            <a:pPr>
+              <a:spcAft>
+                <a:spcPts val="600"/>
+              </a:spcAft>
+            </a:pPr>
+            <a:r>
+              <a:rPr sz="1500">
+                <a:solidFill>
+                  <a:srgbClr val="22282E"/>
+                </a:solidFill>
+              </a:rPr>
+              <a:t>•  Identifica las capas: -enc (base64 UTF-16LE), -join, [char],   (backticks), Replace, Format.</a:t>
+            </a:r>
+          </a:p>
+          <a:p>
+            <a:pPr>
+              <a:spcAft>
+                <a:spcPts val="600"/>
+              </a:spcAft>
+            </a:pPr>
+            <a:r>
+              <a:rPr sz="1500">
+                <a:solidFill>
+                  <a:srgbClr val="22282E"/>
+                </a:solidFill>
+              </a:rPr>
+              <a:t>•  Decodifica el base64 con CyberChef (From Base64 + Decode text UTF-16LE).</a:t>
+            </a:r>
+          </a:p>
+          <a:p>
+            <a:pPr>
+              <a:spcAft>
+                <a:spcPts val="600"/>
+              </a:spcAft>
+            </a:pPr>
+            <a:r>
+              <a:rPr sz="1500">
+                <a:solidFill>
+                  <a:srgbClr val="22282E"/>
+                </a:solidFill>
+              </a:rPr>
+              <a:t>•  Sustituye el IEX final por Write-Output para revelar la siguiente capa sin ejecutarla. Repite hasta el código limpio.</a:t>
+            </a:r>
+          </a:p>
+          <a:p>
+            <a:pPr>
+              <a:spcAft>
+                <a:spcPts val="600"/>
+              </a:spcAft>
+            </a:pPr>
+            <a:r>
+              <a:rPr sz="1500">
+                <a:solidFill>
+                  <a:srgbClr val="22282E"/>
+                </a:solidFill>
+              </a:rPr>
+              <a:t>•  Localiza la lógica real: Net.WebClient.DownloadString, Reflection.Assembly, shellcode en [Byte[]], VirtualAlloc/CreateThread (inyección).</a:t>
+            </a:r>
+          </a:p>
+          <a:p>
+            <a:pPr>
+              <a:spcAft>
+                <a:spcPts val="600"/>
+              </a:spcAft>
+            </a:pPr>
+            <a:r>
+              <a:rPr sz="1500">
+                <a:solidFill>
+                  <a:srgbClr val="22282E"/>
+                </a:solidFill>
+              </a:rPr>
+              <a:t>•  Correlaciona con ScriptBlock Logging: activa el registro, y en una ejecución controlada previa (o en logs provistos) recupera el bloque desofuscado que Windows ya registró.</a:t>
+            </a:r>
+          </a:p>
+          <a:p>
+            <a:pPr>
+              <a:spcAft>
+                <a:spcPts val="600"/>
+              </a:spcAft>
+            </a:pPr>
+            <a:r>
+              <a:rPr sz="1500">
+                <a:solidFill>
+                  <a:srgbClr val="22282E"/>
+                </a:solidFill>
+              </a:rPr>
+              <a:t>•  JScript/HTA:</a:t>
             </a:r>
           </a:p>
         </p:txBody>
